--- a/獻上尊榮.pptx
+++ b/獻上尊榮.pptx
@@ -167,7 +167,7 @@
           <a:lstStyle/>
           <a:p>
             <a:r>
-              <a:rPr lang="en-US" altLang="zh-TW" smtClean="0"/>
+              <a:rPr lang="en-US" altLang="zh-TW"/>
               <a:t>Click to edit Master title style</a:t>
             </a:r>
             <a:endParaRPr lang="zh-TW" altLang="en-US"/>
@@ -286,7 +286,7 @@
           </a:lstStyle>
           <a:p>
             <a:r>
-              <a:rPr lang="en-US" altLang="zh-TW" smtClean="0"/>
+              <a:rPr lang="en-US" altLang="zh-TW"/>
               <a:t>Click to edit Master subtitle style</a:t>
             </a:r>
             <a:endParaRPr lang="zh-TW" altLang="en-US"/>
@@ -310,7 +310,7 @@
           <a:p>
             <a:fld id="{5E62D6B2-7E33-46AD-B130-D8364AACFF57}" type="datetimeFigureOut">
               <a:rPr lang="en-US" smtClean="0"/>
-              <a:t>2/9/2021</a:t>
+              <a:t>8/17/2025</a:t>
             </a:fld>
             <a:endParaRPr lang="en-US"/>
           </a:p>
@@ -399,7 +399,7 @@
           <a:lstStyle/>
           <a:p>
             <a:r>
-              <a:rPr lang="en-US" altLang="zh-TW" smtClean="0"/>
+              <a:rPr lang="en-US" altLang="zh-TW"/>
               <a:t>Click to edit Master title style</a:t>
             </a:r>
             <a:endParaRPr lang="zh-TW" altLang="en-US"/>
@@ -423,35 +423,35 @@
           <a:p>
             <a:pPr lvl="0"/>
             <a:r>
-              <a:rPr lang="en-US" altLang="zh-TW" smtClean="0"/>
+              <a:rPr lang="en-US" altLang="zh-TW"/>
               <a:t>Click to edit Master text styles</a:t>
             </a:r>
           </a:p>
           <a:p>
             <a:pPr lvl="1"/>
             <a:r>
-              <a:rPr lang="en-US" altLang="zh-TW" smtClean="0"/>
+              <a:rPr lang="en-US" altLang="zh-TW"/>
               <a:t>Second level</a:t>
             </a:r>
           </a:p>
           <a:p>
             <a:pPr lvl="2"/>
             <a:r>
-              <a:rPr lang="en-US" altLang="zh-TW" smtClean="0"/>
+              <a:rPr lang="en-US" altLang="zh-TW"/>
               <a:t>Third level</a:t>
             </a:r>
           </a:p>
           <a:p>
             <a:pPr lvl="3"/>
             <a:r>
-              <a:rPr lang="en-US" altLang="zh-TW" smtClean="0"/>
+              <a:rPr lang="en-US" altLang="zh-TW"/>
               <a:t>Fourth level</a:t>
             </a:r>
           </a:p>
           <a:p>
             <a:pPr lvl="4"/>
             <a:r>
-              <a:rPr lang="en-US" altLang="zh-TW" smtClean="0"/>
+              <a:rPr lang="en-US" altLang="zh-TW"/>
               <a:t>Fifth level</a:t>
             </a:r>
             <a:endParaRPr lang="zh-TW" altLang="en-US"/>
@@ -475,7 +475,7 @@
           <a:p>
             <a:fld id="{5E62D6B2-7E33-46AD-B130-D8364AACFF57}" type="datetimeFigureOut">
               <a:rPr lang="en-US" smtClean="0"/>
-              <a:t>2/9/2021</a:t>
+              <a:t>8/17/2025</a:t>
             </a:fld>
             <a:endParaRPr lang="en-US"/>
           </a:p>
@@ -569,7 +569,7 @@
           <a:lstStyle/>
           <a:p>
             <a:r>
-              <a:rPr lang="en-US" altLang="zh-TW" smtClean="0"/>
+              <a:rPr lang="en-US" altLang="zh-TW"/>
               <a:t>Click to edit Master title style</a:t>
             </a:r>
             <a:endParaRPr lang="zh-TW" altLang="en-US"/>
@@ -598,35 +598,35 @@
           <a:p>
             <a:pPr lvl="0"/>
             <a:r>
-              <a:rPr lang="en-US" altLang="zh-TW" smtClean="0"/>
+              <a:rPr lang="en-US" altLang="zh-TW"/>
               <a:t>Click to edit Master text styles</a:t>
             </a:r>
           </a:p>
           <a:p>
             <a:pPr lvl="1"/>
             <a:r>
-              <a:rPr lang="en-US" altLang="zh-TW" smtClean="0"/>
+              <a:rPr lang="en-US" altLang="zh-TW"/>
               <a:t>Second level</a:t>
             </a:r>
           </a:p>
           <a:p>
             <a:pPr lvl="2"/>
             <a:r>
-              <a:rPr lang="en-US" altLang="zh-TW" smtClean="0"/>
+              <a:rPr lang="en-US" altLang="zh-TW"/>
               <a:t>Third level</a:t>
             </a:r>
           </a:p>
           <a:p>
             <a:pPr lvl="3"/>
             <a:r>
-              <a:rPr lang="en-US" altLang="zh-TW" smtClean="0"/>
+              <a:rPr lang="en-US" altLang="zh-TW"/>
               <a:t>Fourth level</a:t>
             </a:r>
           </a:p>
           <a:p>
             <a:pPr lvl="4"/>
             <a:r>
-              <a:rPr lang="en-US" altLang="zh-TW" smtClean="0"/>
+              <a:rPr lang="en-US" altLang="zh-TW"/>
               <a:t>Fifth level</a:t>
             </a:r>
             <a:endParaRPr lang="zh-TW" altLang="en-US"/>
@@ -650,7 +650,7 @@
           <a:p>
             <a:fld id="{5E62D6B2-7E33-46AD-B130-D8364AACFF57}" type="datetimeFigureOut">
               <a:rPr lang="en-US" smtClean="0"/>
-              <a:t>2/9/2021</a:t>
+              <a:t>8/17/2025</a:t>
             </a:fld>
             <a:endParaRPr lang="en-US"/>
           </a:p>
@@ -739,7 +739,7 @@
           <a:lstStyle/>
           <a:p>
             <a:r>
-              <a:rPr lang="en-US" altLang="zh-TW" smtClean="0"/>
+              <a:rPr lang="en-US" altLang="zh-TW"/>
               <a:t>Click to edit Master title style</a:t>
             </a:r>
             <a:endParaRPr lang="zh-TW" altLang="en-US"/>
@@ -763,35 +763,35 @@
           <a:p>
             <a:pPr lvl="0"/>
             <a:r>
-              <a:rPr lang="en-US" altLang="zh-TW" smtClean="0"/>
+              <a:rPr lang="en-US" altLang="zh-TW"/>
               <a:t>Click to edit Master text styles</a:t>
             </a:r>
           </a:p>
           <a:p>
             <a:pPr lvl="1"/>
             <a:r>
-              <a:rPr lang="en-US" altLang="zh-TW" smtClean="0"/>
+              <a:rPr lang="en-US" altLang="zh-TW"/>
               <a:t>Second level</a:t>
             </a:r>
           </a:p>
           <a:p>
             <a:pPr lvl="2"/>
             <a:r>
-              <a:rPr lang="en-US" altLang="zh-TW" smtClean="0"/>
+              <a:rPr lang="en-US" altLang="zh-TW"/>
               <a:t>Third level</a:t>
             </a:r>
           </a:p>
           <a:p>
             <a:pPr lvl="3"/>
             <a:r>
-              <a:rPr lang="en-US" altLang="zh-TW" smtClean="0"/>
+              <a:rPr lang="en-US" altLang="zh-TW"/>
               <a:t>Fourth level</a:t>
             </a:r>
           </a:p>
           <a:p>
             <a:pPr lvl="4"/>
             <a:r>
-              <a:rPr lang="en-US" altLang="zh-TW" smtClean="0"/>
+              <a:rPr lang="en-US" altLang="zh-TW"/>
               <a:t>Fifth level</a:t>
             </a:r>
             <a:endParaRPr lang="zh-TW" altLang="en-US"/>
@@ -815,7 +815,7 @@
           <a:p>
             <a:fld id="{5E62D6B2-7E33-46AD-B130-D8364AACFF57}" type="datetimeFigureOut">
               <a:rPr lang="en-US" smtClean="0"/>
-              <a:t>2/9/2021</a:t>
+              <a:t>8/17/2025</a:t>
             </a:fld>
             <a:endParaRPr lang="en-US"/>
           </a:p>
@@ -913,7 +913,7 @@
           </a:lstStyle>
           <a:p>
             <a:r>
-              <a:rPr lang="en-US" altLang="zh-TW" smtClean="0"/>
+              <a:rPr lang="en-US" altLang="zh-TW"/>
               <a:t>Click to edit Master title style</a:t>
             </a:r>
             <a:endParaRPr lang="zh-TW" altLang="en-US"/>
@@ -1033,7 +1033,7 @@
           <a:p>
             <a:pPr lvl="0"/>
             <a:r>
-              <a:rPr lang="en-US" altLang="zh-TW" smtClean="0"/>
+              <a:rPr lang="en-US" altLang="zh-TW"/>
               <a:t>Click to edit Master text styles</a:t>
             </a:r>
           </a:p>
@@ -1056,7 +1056,7 @@
           <a:p>
             <a:fld id="{5E62D6B2-7E33-46AD-B130-D8364AACFF57}" type="datetimeFigureOut">
               <a:rPr lang="en-US" smtClean="0"/>
-              <a:t>2/9/2021</a:t>
+              <a:t>8/17/2025</a:t>
             </a:fld>
             <a:endParaRPr lang="en-US"/>
           </a:p>
@@ -1145,7 +1145,7 @@
           <a:lstStyle/>
           <a:p>
             <a:r>
-              <a:rPr lang="en-US" altLang="zh-TW" smtClean="0"/>
+              <a:rPr lang="en-US" altLang="zh-TW"/>
               <a:t>Click to edit Master title style</a:t>
             </a:r>
             <a:endParaRPr lang="zh-TW" altLang="en-US"/>
@@ -1202,35 +1202,35 @@
           <a:p>
             <a:pPr lvl="0"/>
             <a:r>
-              <a:rPr lang="en-US" altLang="zh-TW" smtClean="0"/>
+              <a:rPr lang="en-US" altLang="zh-TW"/>
               <a:t>Click to edit Master text styles</a:t>
             </a:r>
           </a:p>
           <a:p>
             <a:pPr lvl="1"/>
             <a:r>
-              <a:rPr lang="en-US" altLang="zh-TW" smtClean="0"/>
+              <a:rPr lang="en-US" altLang="zh-TW"/>
               <a:t>Second level</a:t>
             </a:r>
           </a:p>
           <a:p>
             <a:pPr lvl="2"/>
             <a:r>
-              <a:rPr lang="en-US" altLang="zh-TW" smtClean="0"/>
+              <a:rPr lang="en-US" altLang="zh-TW"/>
               <a:t>Third level</a:t>
             </a:r>
           </a:p>
           <a:p>
             <a:pPr lvl="3"/>
             <a:r>
-              <a:rPr lang="en-US" altLang="zh-TW" smtClean="0"/>
+              <a:rPr lang="en-US" altLang="zh-TW"/>
               <a:t>Fourth level</a:t>
             </a:r>
           </a:p>
           <a:p>
             <a:pPr lvl="4"/>
             <a:r>
-              <a:rPr lang="en-US" altLang="zh-TW" smtClean="0"/>
+              <a:rPr lang="en-US" altLang="zh-TW"/>
               <a:t>Fifth level</a:t>
             </a:r>
             <a:endParaRPr lang="zh-TW" altLang="en-US"/>
@@ -1287,35 +1287,35 @@
           <a:p>
             <a:pPr lvl="0"/>
             <a:r>
-              <a:rPr lang="en-US" altLang="zh-TW" smtClean="0"/>
+              <a:rPr lang="en-US" altLang="zh-TW"/>
               <a:t>Click to edit Master text styles</a:t>
             </a:r>
           </a:p>
           <a:p>
             <a:pPr lvl="1"/>
             <a:r>
-              <a:rPr lang="en-US" altLang="zh-TW" smtClean="0"/>
+              <a:rPr lang="en-US" altLang="zh-TW"/>
               <a:t>Second level</a:t>
             </a:r>
           </a:p>
           <a:p>
             <a:pPr lvl="2"/>
             <a:r>
-              <a:rPr lang="en-US" altLang="zh-TW" smtClean="0"/>
+              <a:rPr lang="en-US" altLang="zh-TW"/>
               <a:t>Third level</a:t>
             </a:r>
           </a:p>
           <a:p>
             <a:pPr lvl="3"/>
             <a:r>
-              <a:rPr lang="en-US" altLang="zh-TW" smtClean="0"/>
+              <a:rPr lang="en-US" altLang="zh-TW"/>
               <a:t>Fourth level</a:t>
             </a:r>
           </a:p>
           <a:p>
             <a:pPr lvl="4"/>
             <a:r>
-              <a:rPr lang="en-US" altLang="zh-TW" smtClean="0"/>
+              <a:rPr lang="en-US" altLang="zh-TW"/>
               <a:t>Fifth level</a:t>
             </a:r>
             <a:endParaRPr lang="zh-TW" altLang="en-US"/>
@@ -1339,7 +1339,7 @@
           <a:p>
             <a:fld id="{5E62D6B2-7E33-46AD-B130-D8364AACFF57}" type="datetimeFigureOut">
               <a:rPr lang="en-US" smtClean="0"/>
-              <a:t>2/9/2021</a:t>
+              <a:t>8/17/2025</a:t>
             </a:fld>
             <a:endParaRPr lang="en-US"/>
           </a:p>
@@ -1432,7 +1432,7 @@
           </a:lstStyle>
           <a:p>
             <a:r>
-              <a:rPr lang="en-US" altLang="zh-TW" smtClean="0"/>
+              <a:rPr lang="en-US" altLang="zh-TW"/>
               <a:t>Click to edit Master title style</a:t>
             </a:r>
             <a:endParaRPr lang="zh-TW" altLang="en-US"/>
@@ -1498,7 +1498,7 @@
           <a:p>
             <a:pPr lvl="0"/>
             <a:r>
-              <a:rPr lang="en-US" altLang="zh-TW" smtClean="0"/>
+              <a:rPr lang="en-US" altLang="zh-TW"/>
               <a:t>Click to edit Master text styles</a:t>
             </a:r>
           </a:p>
@@ -1554,35 +1554,35 @@
           <a:p>
             <a:pPr lvl="0"/>
             <a:r>
-              <a:rPr lang="en-US" altLang="zh-TW" smtClean="0"/>
+              <a:rPr lang="en-US" altLang="zh-TW"/>
               <a:t>Click to edit Master text styles</a:t>
             </a:r>
           </a:p>
           <a:p>
             <a:pPr lvl="1"/>
             <a:r>
-              <a:rPr lang="en-US" altLang="zh-TW" smtClean="0"/>
+              <a:rPr lang="en-US" altLang="zh-TW"/>
               <a:t>Second level</a:t>
             </a:r>
           </a:p>
           <a:p>
             <a:pPr lvl="2"/>
             <a:r>
-              <a:rPr lang="en-US" altLang="zh-TW" smtClean="0"/>
+              <a:rPr lang="en-US" altLang="zh-TW"/>
               <a:t>Third level</a:t>
             </a:r>
           </a:p>
           <a:p>
             <a:pPr lvl="3"/>
             <a:r>
-              <a:rPr lang="en-US" altLang="zh-TW" smtClean="0"/>
+              <a:rPr lang="en-US" altLang="zh-TW"/>
               <a:t>Fourth level</a:t>
             </a:r>
           </a:p>
           <a:p>
             <a:pPr lvl="4"/>
             <a:r>
-              <a:rPr lang="en-US" altLang="zh-TW" smtClean="0"/>
+              <a:rPr lang="en-US" altLang="zh-TW"/>
               <a:t>Fifth level</a:t>
             </a:r>
             <a:endParaRPr lang="zh-TW" altLang="en-US"/>
@@ -1648,7 +1648,7 @@
           <a:p>
             <a:pPr lvl="0"/>
             <a:r>
-              <a:rPr lang="en-US" altLang="zh-TW" smtClean="0"/>
+              <a:rPr lang="en-US" altLang="zh-TW"/>
               <a:t>Click to edit Master text styles</a:t>
             </a:r>
           </a:p>
@@ -1704,35 +1704,35 @@
           <a:p>
             <a:pPr lvl="0"/>
             <a:r>
-              <a:rPr lang="en-US" altLang="zh-TW" smtClean="0"/>
+              <a:rPr lang="en-US" altLang="zh-TW"/>
               <a:t>Click to edit Master text styles</a:t>
             </a:r>
           </a:p>
           <a:p>
             <a:pPr lvl="1"/>
             <a:r>
-              <a:rPr lang="en-US" altLang="zh-TW" smtClean="0"/>
+              <a:rPr lang="en-US" altLang="zh-TW"/>
               <a:t>Second level</a:t>
             </a:r>
           </a:p>
           <a:p>
             <a:pPr lvl="2"/>
             <a:r>
-              <a:rPr lang="en-US" altLang="zh-TW" smtClean="0"/>
+              <a:rPr lang="en-US" altLang="zh-TW"/>
               <a:t>Third level</a:t>
             </a:r>
           </a:p>
           <a:p>
             <a:pPr lvl="3"/>
             <a:r>
-              <a:rPr lang="en-US" altLang="zh-TW" smtClean="0"/>
+              <a:rPr lang="en-US" altLang="zh-TW"/>
               <a:t>Fourth level</a:t>
             </a:r>
           </a:p>
           <a:p>
             <a:pPr lvl="4"/>
             <a:r>
-              <a:rPr lang="en-US" altLang="zh-TW" smtClean="0"/>
+              <a:rPr lang="en-US" altLang="zh-TW"/>
               <a:t>Fifth level</a:t>
             </a:r>
             <a:endParaRPr lang="zh-TW" altLang="en-US"/>
@@ -1756,7 +1756,7 @@
           <a:p>
             <a:fld id="{5E62D6B2-7E33-46AD-B130-D8364AACFF57}" type="datetimeFigureOut">
               <a:rPr lang="en-US" smtClean="0"/>
-              <a:t>2/9/2021</a:t>
+              <a:t>8/17/2025</a:t>
             </a:fld>
             <a:endParaRPr lang="en-US"/>
           </a:p>
@@ -1845,7 +1845,7 @@
           <a:lstStyle/>
           <a:p>
             <a:r>
-              <a:rPr lang="en-US" altLang="zh-TW" smtClean="0"/>
+              <a:rPr lang="en-US" altLang="zh-TW"/>
               <a:t>Click to edit Master title style</a:t>
             </a:r>
             <a:endParaRPr lang="zh-TW" altLang="en-US"/>
@@ -1869,7 +1869,7 @@
           <a:p>
             <a:fld id="{5E62D6B2-7E33-46AD-B130-D8364AACFF57}" type="datetimeFigureOut">
               <a:rPr lang="en-US" smtClean="0"/>
-              <a:t>2/9/2021</a:t>
+              <a:t>8/17/2025</a:t>
             </a:fld>
             <a:endParaRPr lang="en-US"/>
           </a:p>
@@ -1959,7 +1959,7 @@
           <a:p>
             <a:fld id="{5E62D6B2-7E33-46AD-B130-D8364AACFF57}" type="datetimeFigureOut">
               <a:rPr lang="en-US" smtClean="0"/>
-              <a:t>2/9/2021</a:t>
+              <a:t>8/17/2025</a:t>
             </a:fld>
             <a:endParaRPr lang="en-US"/>
           </a:p>
@@ -2057,7 +2057,7 @@
           </a:lstStyle>
           <a:p>
             <a:r>
-              <a:rPr lang="en-US" altLang="zh-TW" smtClean="0"/>
+              <a:rPr lang="en-US" altLang="zh-TW"/>
               <a:t>Click to edit Master title style</a:t>
             </a:r>
             <a:endParaRPr lang="zh-TW" altLang="en-US"/>
@@ -2114,35 +2114,35 @@
           <a:p>
             <a:pPr lvl="0"/>
             <a:r>
-              <a:rPr lang="en-US" altLang="zh-TW" smtClean="0"/>
+              <a:rPr lang="en-US" altLang="zh-TW"/>
               <a:t>Click to edit Master text styles</a:t>
             </a:r>
           </a:p>
           <a:p>
             <a:pPr lvl="1"/>
             <a:r>
-              <a:rPr lang="en-US" altLang="zh-TW" smtClean="0"/>
+              <a:rPr lang="en-US" altLang="zh-TW"/>
               <a:t>Second level</a:t>
             </a:r>
           </a:p>
           <a:p>
             <a:pPr lvl="2"/>
             <a:r>
-              <a:rPr lang="en-US" altLang="zh-TW" smtClean="0"/>
+              <a:rPr lang="en-US" altLang="zh-TW"/>
               <a:t>Third level</a:t>
             </a:r>
           </a:p>
           <a:p>
             <a:pPr lvl="3"/>
             <a:r>
-              <a:rPr lang="en-US" altLang="zh-TW" smtClean="0"/>
+              <a:rPr lang="en-US" altLang="zh-TW"/>
               <a:t>Fourth level</a:t>
             </a:r>
           </a:p>
           <a:p>
             <a:pPr lvl="4"/>
             <a:r>
-              <a:rPr lang="en-US" altLang="zh-TW" smtClean="0"/>
+              <a:rPr lang="en-US" altLang="zh-TW"/>
               <a:t>Fifth level</a:t>
             </a:r>
             <a:endParaRPr lang="zh-TW" altLang="en-US"/>
@@ -2208,7 +2208,7 @@
           <a:p>
             <a:pPr lvl="0"/>
             <a:r>
-              <a:rPr lang="en-US" altLang="zh-TW" smtClean="0"/>
+              <a:rPr lang="en-US" altLang="zh-TW"/>
               <a:t>Click to edit Master text styles</a:t>
             </a:r>
           </a:p>
@@ -2231,7 +2231,7 @@
           <a:p>
             <a:fld id="{5E62D6B2-7E33-46AD-B130-D8364AACFF57}" type="datetimeFigureOut">
               <a:rPr lang="en-US" smtClean="0"/>
-              <a:t>2/9/2021</a:t>
+              <a:t>8/17/2025</a:t>
             </a:fld>
             <a:endParaRPr lang="en-US"/>
           </a:p>
@@ -2329,7 +2329,7 @@
           </a:lstStyle>
           <a:p>
             <a:r>
-              <a:rPr lang="en-US" altLang="zh-TW" smtClean="0"/>
+              <a:rPr lang="en-US" altLang="zh-TW"/>
               <a:t>Click to edit Master title style</a:t>
             </a:r>
             <a:endParaRPr lang="zh-TW" altLang="en-US"/>
@@ -2394,7 +2394,7 @@
           </a:lstStyle>
           <a:p>
             <a:r>
-              <a:rPr lang="en-US" altLang="zh-TW" smtClean="0"/>
+              <a:rPr lang="en-US" altLang="zh-TW"/>
               <a:t>Click icon to add picture</a:t>
             </a:r>
             <a:endParaRPr lang="zh-TW" altLang="en-US"/>
@@ -2460,7 +2460,7 @@
           <a:p>
             <a:pPr lvl="0"/>
             <a:r>
-              <a:rPr lang="en-US" altLang="zh-TW" smtClean="0"/>
+              <a:rPr lang="en-US" altLang="zh-TW"/>
               <a:t>Click to edit Master text styles</a:t>
             </a:r>
           </a:p>
@@ -2483,7 +2483,7 @@
           <a:p>
             <a:fld id="{5E62D6B2-7E33-46AD-B130-D8364AACFF57}" type="datetimeFigureOut">
               <a:rPr lang="en-US" smtClean="0"/>
-              <a:t>2/9/2021</a:t>
+              <a:t>8/17/2025</a:t>
             </a:fld>
             <a:endParaRPr lang="en-US"/>
           </a:p>
@@ -2592,10 +2592,9 @@
           <a:lstStyle/>
           <a:p>
             <a:r>
-              <a:rPr lang="zh-TW" altLang="en-US" smtClean="0"/>
+              <a:rPr lang="zh-TW" altLang="en-US"/>
               <a:t>按一下以編輯母片標題樣式</a:t>
             </a:r>
-            <a:endParaRPr lang="zh-TW" altLang="en-US"/>
           </a:p>
         </p:txBody>
       </p:sp>
@@ -2626,38 +2625,37 @@
           <a:p>
             <a:pPr lvl="0"/>
             <a:r>
-              <a:rPr lang="zh-TW" altLang="en-US" smtClean="0"/>
+              <a:rPr lang="zh-TW" altLang="en-US"/>
               <a:t>按一下以編輯母片文字樣式</a:t>
             </a:r>
           </a:p>
           <a:p>
             <a:pPr lvl="1"/>
             <a:r>
-              <a:rPr lang="zh-TW" altLang="en-US" smtClean="0"/>
+              <a:rPr lang="zh-TW" altLang="en-US"/>
               <a:t>第二層</a:t>
             </a:r>
           </a:p>
           <a:p>
             <a:pPr lvl="2"/>
             <a:r>
-              <a:rPr lang="zh-TW" altLang="en-US" smtClean="0"/>
+              <a:rPr lang="zh-TW" altLang="en-US"/>
               <a:t>第三層</a:t>
             </a:r>
           </a:p>
           <a:p>
             <a:pPr lvl="3"/>
             <a:r>
-              <a:rPr lang="zh-TW" altLang="en-US" smtClean="0"/>
+              <a:rPr lang="zh-TW" altLang="en-US"/>
               <a:t>第四層</a:t>
             </a:r>
           </a:p>
           <a:p>
             <a:pPr lvl="4"/>
             <a:r>
-              <a:rPr lang="zh-TW" altLang="en-US" smtClean="0"/>
+              <a:rPr lang="zh-TW" altLang="en-US"/>
               <a:t>第五層</a:t>
             </a:r>
-            <a:endParaRPr lang="zh-TW" altLang="en-US"/>
           </a:p>
         </p:txBody>
       </p:sp>
@@ -2696,7 +2694,7 @@
           <a:p>
             <a:fld id="{5E62D6B2-7E33-46AD-B130-D8364AACFF57}" type="datetimeFigureOut">
               <a:rPr lang="en-US" smtClean="0"/>
-              <a:t>2/9/2021</a:t>
+              <a:t>8/17/2025</a:t>
             </a:fld>
             <a:endParaRPr lang="en-US"/>
           </a:p>
@@ -3089,7 +3087,7 @@
           <a:lstStyle/>
           <a:p>
             <a:r>
-              <a:rPr lang="zh-CN" altLang="en-US" sz="5400" b="1" i="1" dirty="0" smtClean="0">
+              <a:rPr lang="zh-CN" altLang="en-US" sz="5400" b="1" i="1" dirty="0">
                 <a:solidFill>
                   <a:srgbClr val="000066"/>
                 </a:solidFill>
@@ -3103,24 +3101,7 @@
                 <a:latin typeface="微軟正黑體" pitchFamily="34" charset="-120"/>
                 <a:ea typeface="微軟正黑體" pitchFamily="34" charset="-120"/>
               </a:rPr>
-              <a:t>獻</a:t>
-            </a:r>
-            <a:r>
-              <a:rPr lang="zh-CN" altLang="en-US" sz="5400" b="1" i="1" dirty="0">
-                <a:solidFill>
-                  <a:srgbClr val="000066"/>
-                </a:solidFill>
-                <a:effectLst>
-                  <a:outerShdw blurRad="38100" dist="38100" dir="2700000" algn="tl">
-                    <a:srgbClr val="000000">
-                      <a:alpha val="43137"/>
-                    </a:srgbClr>
-                  </a:outerShdw>
-                </a:effectLst>
-                <a:latin typeface="微軟正黑體" pitchFamily="34" charset="-120"/>
-                <a:ea typeface="微軟正黑體" pitchFamily="34" charset="-120"/>
-              </a:rPr>
-              <a:t>上尊榮</a:t>
+              <a:t>獻上尊榮</a:t>
             </a:r>
             <a:endParaRPr lang="zh-TW" altLang="en-US" sz="5400" b="1" i="1" dirty="0">
               <a:solidFill>
@@ -3202,27 +3183,7 @@
                 <a:latin typeface="Microsoft JhengHei" pitchFamily="34" charset="-120"/>
                 <a:ea typeface="Microsoft JhengHei" pitchFamily="34" charset="-120"/>
               </a:rPr>
-              <a:t>耶穌基督  </a:t>
-            </a:r>
-            <a:r>
-              <a:rPr lang="zh-TW" altLang="en-US" sz="4800" b="1" dirty="0" smtClean="0">
-                <a:solidFill>
-                  <a:srgbClr val="000066"/>
-                </a:solidFill>
-                <a:latin typeface="Microsoft JhengHei" pitchFamily="34" charset="-120"/>
-                <a:ea typeface="Microsoft JhengHei" pitchFamily="34" charset="-120"/>
-              </a:rPr>
-              <a:t>榮</a:t>
-            </a:r>
-            <a:r>
-              <a:rPr lang="zh-TW" altLang="en-US" sz="4800" b="1" dirty="0">
-                <a:solidFill>
-                  <a:srgbClr val="000066"/>
-                </a:solidFill>
-                <a:latin typeface="Microsoft JhengHei" pitchFamily="34" charset="-120"/>
-                <a:ea typeface="Microsoft JhengHei" pitchFamily="34" charset="-120"/>
-              </a:rPr>
-              <a:t>耀父神彰顯</a:t>
+              <a:t>耶穌基督  榮耀父神彰顯</a:t>
             </a:r>
             <a:endParaRPr lang="en-US" altLang="zh-TW" sz="4800" b="1" dirty="0">
               <a:solidFill>
@@ -3244,27 +3205,7 @@
                 <a:latin typeface="Microsoft JhengHei" pitchFamily="34" charset="-120"/>
                 <a:ea typeface="Microsoft JhengHei" pitchFamily="34" charset="-120"/>
               </a:rPr>
-              <a:t>救贖真</a:t>
-            </a:r>
-            <a:r>
-              <a:rPr lang="zh-TW" altLang="en-US" sz="4800" b="1" dirty="0" smtClean="0">
-                <a:solidFill>
-                  <a:srgbClr val="000066"/>
-                </a:solidFill>
-                <a:latin typeface="Microsoft JhengHei" pitchFamily="34" charset="-120"/>
-                <a:ea typeface="Microsoft JhengHei" pitchFamily="34" charset="-120"/>
-              </a:rPr>
-              <a:t>光  </a:t>
-            </a:r>
-            <a:r>
-              <a:rPr lang="zh-TW" altLang="en-US" sz="4800" b="1" dirty="0">
-                <a:solidFill>
-                  <a:srgbClr val="000066"/>
-                </a:solidFill>
-                <a:latin typeface="Microsoft JhengHei" pitchFamily="34" charset="-120"/>
-                <a:ea typeface="Microsoft JhengHei" pitchFamily="34" charset="-120"/>
-              </a:rPr>
-              <a:t>萬國的盼望</a:t>
+              <a:t>救贖真光  萬國的盼望</a:t>
             </a:r>
             <a:endParaRPr lang="en-US" altLang="zh-TW" sz="4800" b="1" dirty="0">
               <a:solidFill>
@@ -3272,6 +3213,78 @@
               </a:solidFill>
               <a:latin typeface="Microsoft JhengHei" pitchFamily="34" charset="-120"/>
               <a:ea typeface="Microsoft JhengHei" pitchFamily="34" charset="-120"/>
+            </a:endParaRPr>
+          </a:p>
+        </p:txBody>
+      </p:sp>
+      <p:sp>
+        <p:nvSpPr>
+          <p:cNvPr id="2" name="TextBox 1">
+            <a:extLst>
+              <a:ext uri="{FF2B5EF4-FFF2-40B4-BE49-F238E27FC236}">
+                <a16:creationId xmlns:a16="http://schemas.microsoft.com/office/drawing/2014/main" id="{6E74CA44-AC71-74E9-32DA-205E28527124}"/>
+              </a:ext>
+            </a:extLst>
+          </p:cNvPr>
+          <p:cNvSpPr txBox="1"/>
+          <p:nvPr/>
+        </p:nvSpPr>
+        <p:spPr>
+          <a:xfrm>
+            <a:off x="0" y="3845009"/>
+            <a:ext cx="9144000" cy="461665"/>
+          </a:xfrm>
+          <a:prstGeom prst="rect">
+            <a:avLst/>
+          </a:prstGeom>
+          <a:noFill/>
+        </p:spPr>
+        <p:txBody>
+          <a:bodyPr wrap="square" rtlCol="0">
+            <a:spAutoFit/>
+          </a:bodyPr>
+          <a:lstStyle/>
+          <a:p>
+            <a:pPr algn="ctr"/>
+            <a:r>
+              <a:rPr lang="en-US" sz="2400" b="1" dirty="0">
+                <a:solidFill>
+                  <a:srgbClr val="000066"/>
+                </a:solidFill>
+                <a:effectLst/>
+                <a:latin typeface="Microsoft JhengHei" panose="020B0604030504040204" pitchFamily="34" charset="-120"/>
+                <a:ea typeface="Microsoft JhengHei" panose="020B0604030504040204" pitchFamily="34" charset="-120"/>
+              </a:rPr>
+              <a:t>( </a:t>
+            </a:r>
+            <a:r>
+              <a:rPr lang="zh-CN" altLang="en-US" sz="2400" b="1" dirty="0">
+                <a:solidFill>
+                  <a:srgbClr val="000066"/>
+                </a:solidFill>
+                <a:effectLst/>
+                <a:latin typeface="Microsoft JhengHei" panose="020B0604030504040204" pitchFamily="34" charset="-120"/>
+                <a:ea typeface="Microsoft JhengHei" panose="020B0604030504040204" pitchFamily="34" charset="-120"/>
+              </a:rPr>
+              <a:t>正歌</a:t>
+            </a:r>
+            <a:r>
+              <a:rPr lang="en-US" sz="2400" b="1" dirty="0">
+                <a:solidFill>
+                  <a:srgbClr val="000066"/>
+                </a:solidFill>
+                <a:effectLst/>
+                <a:latin typeface="Microsoft JhengHei" panose="020B0604030504040204" pitchFamily="34" charset="-120"/>
+                <a:ea typeface="Microsoft JhengHei" panose="020B0604030504040204" pitchFamily="34" charset="-120"/>
+              </a:rPr>
+              <a:t> )</a:t>
+            </a:r>
+            <a:endParaRPr lang="vi-VN" sz="2400" b="1" dirty="0">
+              <a:solidFill>
+                <a:srgbClr val="000066"/>
+              </a:solidFill>
+              <a:effectLst/>
+              <a:ea typeface="Microsoft JhengHei" panose="020B0604030504040204" pitchFamily="34" charset="-120"/>
             </a:endParaRPr>
           </a:p>
         </p:txBody>
@@ -3332,34 +3345,24 @@
               <a:buNone/>
             </a:pPr>
             <a:r>
-              <a:rPr lang="zh-CN" altLang="en-US" sz="4800" b="1" dirty="0" smtClean="0">
+              <a:rPr lang="zh-CN" altLang="en-US" sz="4800" b="1" dirty="0">
                 <a:solidFill>
                   <a:srgbClr val="000066"/>
                 </a:solidFill>
                 <a:latin typeface="Microsoft JhengHei" pitchFamily="34" charset="-120"/>
                 <a:ea typeface="Microsoft JhengHei" pitchFamily="34" charset="-120"/>
               </a:rPr>
-              <a:t>袮</a:t>
-            </a:r>
-            <a:r>
-              <a:rPr lang="zh-TW" altLang="en-US" sz="4800" b="1" dirty="0" smtClean="0">
+              <a:t>祢</a:t>
+            </a:r>
+            <a:r>
+              <a:rPr lang="zh-TW" altLang="en-US" sz="4800" b="1" dirty="0">
                 <a:solidFill>
                   <a:srgbClr val="000066"/>
                 </a:solidFill>
                 <a:latin typeface="Microsoft JhengHei" pitchFamily="34" charset="-120"/>
                 <a:ea typeface="Microsoft JhengHei" pitchFamily="34" charset="-120"/>
               </a:rPr>
-              <a:t>的</a:t>
-            </a:r>
-            <a:r>
-              <a:rPr lang="zh-TW" altLang="en-US" sz="4800" b="1" dirty="0">
-                <a:solidFill>
-                  <a:srgbClr val="000066"/>
-                </a:solidFill>
-                <a:latin typeface="Microsoft JhengHei" pitchFamily="34" charset="-120"/>
-                <a:ea typeface="Microsoft JhengHei" pitchFamily="34" charset="-120"/>
-              </a:rPr>
-              <a:t>國度寶座存到永遠</a:t>
+              <a:t>的國度寶座存到永遠</a:t>
             </a:r>
             <a:endParaRPr lang="en-US" altLang="zh-TW" sz="4800" b="1" dirty="0">
               <a:solidFill>
@@ -3381,47 +3384,27 @@
                 <a:latin typeface="Microsoft JhengHei" pitchFamily="34" charset="-120"/>
                 <a:ea typeface="Microsoft JhengHei" pitchFamily="34" charset="-120"/>
               </a:rPr>
-              <a:t>唯</a:t>
-            </a:r>
-            <a:r>
-              <a:rPr lang="zh-TW" altLang="en-US" sz="4800" b="1" dirty="0" smtClean="0">
+              <a:t>唯有</a:t>
+            </a:r>
+            <a:r>
+              <a:rPr lang="zh-CN" altLang="en-US" sz="4800" b="1" dirty="0">
                 <a:solidFill>
                   <a:srgbClr val="000066"/>
                 </a:solidFill>
                 <a:latin typeface="Microsoft JhengHei" pitchFamily="34" charset="-120"/>
                 <a:ea typeface="Microsoft JhengHei" pitchFamily="34" charset="-120"/>
               </a:rPr>
-              <a:t>有</a:t>
-            </a:r>
-            <a:r>
-              <a:rPr lang="zh-CN" altLang="en-US" sz="4800" b="1" dirty="0">
+              <a:t>祢</a:t>
+            </a:r>
+            <a:r>
+              <a:rPr lang="zh-TW" altLang="en-US" sz="4800" b="1" dirty="0">
                 <a:solidFill>
                   <a:srgbClr val="000066"/>
                 </a:solidFill>
                 <a:latin typeface="Microsoft JhengHei" pitchFamily="34" charset="-120"/>
                 <a:ea typeface="Microsoft JhengHei" pitchFamily="34" charset="-120"/>
               </a:rPr>
-              <a:t>袮</a:t>
-            </a:r>
-            <a:r>
-              <a:rPr lang="zh-TW" altLang="en-US" sz="4800" b="1" dirty="0" smtClean="0">
-                <a:solidFill>
-                  <a:srgbClr val="000066"/>
-                </a:solidFill>
-                <a:latin typeface="Microsoft JhengHei" pitchFamily="34" charset="-120"/>
-                <a:ea typeface="Microsoft JhengHei" pitchFamily="34" charset="-120"/>
-              </a:rPr>
-              <a:t>配</a:t>
-            </a:r>
-            <a:r>
-              <a:rPr lang="zh-TW" altLang="en-US" sz="4800" b="1" dirty="0">
-                <a:solidFill>
-                  <a:srgbClr val="000066"/>
-                </a:solidFill>
-                <a:latin typeface="Microsoft JhengHei" pitchFamily="34" charset="-120"/>
-                <a:ea typeface="Microsoft JhengHei" pitchFamily="34" charset="-120"/>
-              </a:rPr>
-              <a:t>得所有頌讚</a:t>
+              <a:t>配得所有頌讚</a:t>
             </a:r>
             <a:endParaRPr lang="en-US" sz="4800" b="1" dirty="0">
               <a:solidFill>
@@ -3429,6 +3412,78 @@
               </a:solidFill>
               <a:latin typeface="Microsoft JhengHei" pitchFamily="34" charset="-120"/>
               <a:ea typeface="Microsoft JhengHei" pitchFamily="34" charset="-120"/>
+            </a:endParaRPr>
+          </a:p>
+        </p:txBody>
+      </p:sp>
+      <p:sp>
+        <p:nvSpPr>
+          <p:cNvPr id="2" name="TextBox 1">
+            <a:extLst>
+              <a:ext uri="{FF2B5EF4-FFF2-40B4-BE49-F238E27FC236}">
+                <a16:creationId xmlns:a16="http://schemas.microsoft.com/office/drawing/2014/main" id="{B7BD2C60-E2A6-2D89-891E-ABAE59A6543D}"/>
+              </a:ext>
+            </a:extLst>
+          </p:cNvPr>
+          <p:cNvSpPr txBox="1"/>
+          <p:nvPr/>
+        </p:nvSpPr>
+        <p:spPr>
+          <a:xfrm>
+            <a:off x="0" y="3845009"/>
+            <a:ext cx="9144000" cy="461665"/>
+          </a:xfrm>
+          <a:prstGeom prst="rect">
+            <a:avLst/>
+          </a:prstGeom>
+          <a:noFill/>
+        </p:spPr>
+        <p:txBody>
+          <a:bodyPr wrap="square" rtlCol="0">
+            <a:spAutoFit/>
+          </a:bodyPr>
+          <a:lstStyle/>
+          <a:p>
+            <a:pPr algn="ctr"/>
+            <a:r>
+              <a:rPr lang="en-US" sz="2400" b="1" dirty="0">
+                <a:solidFill>
+                  <a:srgbClr val="000066"/>
+                </a:solidFill>
+                <a:effectLst/>
+                <a:latin typeface="Microsoft JhengHei" panose="020B0604030504040204" pitchFamily="34" charset="-120"/>
+                <a:ea typeface="Microsoft JhengHei" panose="020B0604030504040204" pitchFamily="34" charset="-120"/>
+              </a:rPr>
+              <a:t>( </a:t>
+            </a:r>
+            <a:r>
+              <a:rPr lang="zh-CN" altLang="en-US" sz="2400" b="1" dirty="0">
+                <a:solidFill>
+                  <a:srgbClr val="000066"/>
+                </a:solidFill>
+                <a:effectLst/>
+                <a:latin typeface="Microsoft JhengHei" panose="020B0604030504040204" pitchFamily="34" charset="-120"/>
+                <a:ea typeface="Microsoft JhengHei" panose="020B0604030504040204" pitchFamily="34" charset="-120"/>
+              </a:rPr>
+              <a:t>正歌</a:t>
+            </a:r>
+            <a:r>
+              <a:rPr lang="en-US" sz="2400" b="1" dirty="0">
+                <a:solidFill>
+                  <a:srgbClr val="000066"/>
+                </a:solidFill>
+                <a:effectLst/>
+                <a:latin typeface="Microsoft JhengHei" panose="020B0604030504040204" pitchFamily="34" charset="-120"/>
+                <a:ea typeface="Microsoft JhengHei" panose="020B0604030504040204" pitchFamily="34" charset="-120"/>
+              </a:rPr>
+              <a:t> )</a:t>
+            </a:r>
+            <a:endParaRPr lang="vi-VN" sz="2400" b="1" dirty="0">
+              <a:solidFill>
+                <a:srgbClr val="000066"/>
+              </a:solidFill>
+              <a:effectLst/>
+              <a:ea typeface="Microsoft JhengHei" panose="020B0604030504040204" pitchFamily="34" charset="-120"/>
             </a:endParaRPr>
           </a:p>
         </p:txBody>
@@ -3530,6 +3585,78 @@
           </a:p>
         </p:txBody>
       </p:sp>
+      <p:sp>
+        <p:nvSpPr>
+          <p:cNvPr id="2" name="TextBox 1">
+            <a:extLst>
+              <a:ext uri="{FF2B5EF4-FFF2-40B4-BE49-F238E27FC236}">
+                <a16:creationId xmlns:a16="http://schemas.microsoft.com/office/drawing/2014/main" id="{2FFC1FA7-765E-86DB-AB1E-DECAD54E27B0}"/>
+              </a:ext>
+            </a:extLst>
+          </p:cNvPr>
+          <p:cNvSpPr txBox="1"/>
+          <p:nvPr/>
+        </p:nvSpPr>
+        <p:spPr>
+          <a:xfrm>
+            <a:off x="0" y="3845009"/>
+            <a:ext cx="9144000" cy="461665"/>
+          </a:xfrm>
+          <a:prstGeom prst="rect">
+            <a:avLst/>
+          </a:prstGeom>
+          <a:noFill/>
+        </p:spPr>
+        <p:txBody>
+          <a:bodyPr wrap="square" rtlCol="0">
+            <a:spAutoFit/>
+          </a:bodyPr>
+          <a:lstStyle/>
+          <a:p>
+            <a:pPr algn="ctr"/>
+            <a:r>
+              <a:rPr lang="en-US" sz="2400" b="1" dirty="0">
+                <a:solidFill>
+                  <a:srgbClr val="000066"/>
+                </a:solidFill>
+                <a:effectLst/>
+                <a:latin typeface="Microsoft JhengHei" panose="020B0604030504040204" pitchFamily="34" charset="-120"/>
+                <a:ea typeface="Microsoft JhengHei" panose="020B0604030504040204" pitchFamily="34" charset="-120"/>
+              </a:rPr>
+              <a:t>( </a:t>
+            </a:r>
+            <a:r>
+              <a:rPr lang="zh-CN" altLang="en-US" sz="2400" b="1" dirty="0">
+                <a:solidFill>
+                  <a:srgbClr val="000066"/>
+                </a:solidFill>
+                <a:effectLst/>
+                <a:latin typeface="Microsoft JhengHei" panose="020B0604030504040204" pitchFamily="34" charset="-120"/>
+                <a:ea typeface="Microsoft JhengHei" panose="020B0604030504040204" pitchFamily="34" charset="-120"/>
+              </a:rPr>
+              <a:t>副歌</a:t>
+            </a:r>
+            <a:r>
+              <a:rPr lang="en-US" sz="2400" b="1" dirty="0">
+                <a:solidFill>
+                  <a:srgbClr val="000066"/>
+                </a:solidFill>
+                <a:effectLst/>
+                <a:latin typeface="Microsoft JhengHei" panose="020B0604030504040204" pitchFamily="34" charset="-120"/>
+                <a:ea typeface="Microsoft JhengHei" panose="020B0604030504040204" pitchFamily="34" charset="-120"/>
+              </a:rPr>
+              <a:t> )</a:t>
+            </a:r>
+            <a:endParaRPr lang="vi-VN" sz="2400" b="1" dirty="0">
+              <a:solidFill>
+                <a:srgbClr val="000066"/>
+              </a:solidFill>
+              <a:effectLst/>
+              <a:ea typeface="Microsoft JhengHei" panose="020B0604030504040204" pitchFamily="34" charset="-120"/>
+            </a:endParaRPr>
+          </a:p>
+        </p:txBody>
+      </p:sp>
     </p:spTree>
     <p:extLst>
       <p:ext uri="{BB962C8B-B14F-4D97-AF65-F5344CB8AC3E}">
@@ -3608,7 +3735,7 @@
               <a:buNone/>
             </a:pPr>
             <a:r>
-              <a:rPr lang="zh-TW" altLang="en-US" sz="4800" b="1" dirty="0" smtClean="0">
+              <a:rPr lang="zh-TW" altLang="en-US" sz="4800" b="1" dirty="0">
                 <a:solidFill>
                   <a:srgbClr val="000066"/>
                 </a:solidFill>
@@ -3618,34 +3745,24 @@
               <a:t>願</a:t>
             </a:r>
             <a:r>
-              <a:rPr lang="zh-CN" altLang="en-US" sz="4800" b="1" dirty="0" smtClean="0">
+              <a:rPr lang="zh-CN" altLang="en-US" sz="4800" b="1" dirty="0">
                 <a:solidFill>
                   <a:srgbClr val="000066"/>
                 </a:solidFill>
                 <a:latin typeface="Microsoft JhengHei" pitchFamily="34" charset="-120"/>
                 <a:ea typeface="Microsoft JhengHei" pitchFamily="34" charset="-120"/>
               </a:rPr>
-              <a:t>袮</a:t>
-            </a:r>
-            <a:r>
-              <a:rPr lang="zh-TW" altLang="en-US" sz="4800" b="1" dirty="0" smtClean="0">
+              <a:t>祢</a:t>
+            </a:r>
+            <a:r>
+              <a:rPr lang="zh-TW" altLang="en-US" sz="4800" b="1" dirty="0">
                 <a:solidFill>
                   <a:srgbClr val="000066"/>
                 </a:solidFill>
                 <a:latin typeface="Microsoft JhengHei" pitchFamily="34" charset="-120"/>
                 <a:ea typeface="Microsoft JhengHei" pitchFamily="34" charset="-120"/>
               </a:rPr>
-              <a:t>崇</a:t>
-            </a:r>
-            <a:r>
-              <a:rPr lang="zh-TW" altLang="en-US" sz="4800" b="1" dirty="0">
-                <a:solidFill>
-                  <a:srgbClr val="000066"/>
-                </a:solidFill>
-                <a:latin typeface="Microsoft JhengHei" pitchFamily="34" charset="-120"/>
-                <a:ea typeface="Microsoft JhengHei" pitchFamily="34" charset="-120"/>
-              </a:rPr>
-              <a:t>高在全地之上</a:t>
+              <a:t>崇高在全地之上</a:t>
             </a:r>
             <a:endParaRPr lang="en-US" sz="4800" b="1" dirty="0">
               <a:solidFill>
@@ -3653,6 +3770,78 @@
               </a:solidFill>
               <a:latin typeface="Microsoft JhengHei" pitchFamily="34" charset="-120"/>
               <a:ea typeface="Microsoft JhengHei" pitchFamily="34" charset="-120"/>
+            </a:endParaRPr>
+          </a:p>
+        </p:txBody>
+      </p:sp>
+      <p:sp>
+        <p:nvSpPr>
+          <p:cNvPr id="2" name="TextBox 1">
+            <a:extLst>
+              <a:ext uri="{FF2B5EF4-FFF2-40B4-BE49-F238E27FC236}">
+                <a16:creationId xmlns:a16="http://schemas.microsoft.com/office/drawing/2014/main" id="{0B1E2DCD-9416-731E-190F-38D81C5401E0}"/>
+              </a:ext>
+            </a:extLst>
+          </p:cNvPr>
+          <p:cNvSpPr txBox="1"/>
+          <p:nvPr/>
+        </p:nvSpPr>
+        <p:spPr>
+          <a:xfrm>
+            <a:off x="0" y="3845009"/>
+            <a:ext cx="9144000" cy="461665"/>
+          </a:xfrm>
+          <a:prstGeom prst="rect">
+            <a:avLst/>
+          </a:prstGeom>
+          <a:noFill/>
+        </p:spPr>
+        <p:txBody>
+          <a:bodyPr wrap="square" rtlCol="0">
+            <a:spAutoFit/>
+          </a:bodyPr>
+          <a:lstStyle/>
+          <a:p>
+            <a:pPr algn="ctr"/>
+            <a:r>
+              <a:rPr lang="en-US" sz="2400" b="1" dirty="0">
+                <a:solidFill>
+                  <a:srgbClr val="000066"/>
+                </a:solidFill>
+                <a:effectLst/>
+                <a:latin typeface="Microsoft JhengHei" panose="020B0604030504040204" pitchFamily="34" charset="-120"/>
+                <a:ea typeface="Microsoft JhengHei" panose="020B0604030504040204" pitchFamily="34" charset="-120"/>
+              </a:rPr>
+              <a:t>( </a:t>
+            </a:r>
+            <a:r>
+              <a:rPr lang="zh-CN" altLang="en-US" sz="2400" b="1" dirty="0">
+                <a:solidFill>
+                  <a:srgbClr val="000066"/>
+                </a:solidFill>
+                <a:effectLst/>
+                <a:latin typeface="Microsoft JhengHei" panose="020B0604030504040204" pitchFamily="34" charset="-120"/>
+                <a:ea typeface="Microsoft JhengHei" panose="020B0604030504040204" pitchFamily="34" charset="-120"/>
+              </a:rPr>
+              <a:t>副歌</a:t>
+            </a:r>
+            <a:r>
+              <a:rPr lang="en-US" sz="2400" b="1" dirty="0">
+                <a:solidFill>
+                  <a:srgbClr val="000066"/>
+                </a:solidFill>
+                <a:effectLst/>
+                <a:latin typeface="Microsoft JhengHei" panose="020B0604030504040204" pitchFamily="34" charset="-120"/>
+                <a:ea typeface="Microsoft JhengHei" panose="020B0604030504040204" pitchFamily="34" charset="-120"/>
+              </a:rPr>
+              <a:t> )</a:t>
+            </a:r>
+            <a:endParaRPr lang="vi-VN" sz="2400" b="1" dirty="0">
+              <a:solidFill>
+                <a:srgbClr val="000066"/>
+              </a:solidFill>
+              <a:effectLst/>
+              <a:ea typeface="Microsoft JhengHei" panose="020B0604030504040204" pitchFamily="34" charset="-120"/>
             </a:endParaRPr>
           </a:p>
         </p:txBody>
@@ -3742,47 +3931,27 @@
                 <a:latin typeface="Microsoft JhengHei" pitchFamily="34" charset="-120"/>
                 <a:ea typeface="Microsoft JhengHei" pitchFamily="34" charset="-120"/>
               </a:rPr>
-              <a:t>唯</a:t>
-            </a:r>
-            <a:r>
-              <a:rPr lang="zh-TW" altLang="en-US" sz="4800" b="1" dirty="0" smtClean="0">
+              <a:t>唯有</a:t>
+            </a:r>
+            <a:r>
+              <a:rPr lang="zh-CN" altLang="en-US" sz="4800" b="1" dirty="0">
                 <a:solidFill>
                   <a:srgbClr val="000066"/>
                 </a:solidFill>
                 <a:latin typeface="Microsoft JhengHei" pitchFamily="34" charset="-120"/>
                 <a:ea typeface="Microsoft JhengHei" pitchFamily="34" charset="-120"/>
               </a:rPr>
-              <a:t>有</a:t>
-            </a:r>
-            <a:r>
-              <a:rPr lang="zh-CN" altLang="en-US" sz="4800" b="1" dirty="0" smtClean="0">
+              <a:t>祢</a:t>
+            </a:r>
+            <a:r>
+              <a:rPr lang="zh-TW" altLang="en-US" sz="4800" b="1" dirty="0">
                 <a:solidFill>
                   <a:srgbClr val="000066"/>
                 </a:solidFill>
                 <a:latin typeface="Microsoft JhengHei" pitchFamily="34" charset="-120"/>
                 <a:ea typeface="Microsoft JhengHei" pitchFamily="34" charset="-120"/>
               </a:rPr>
-              <a:t>袮</a:t>
-            </a:r>
-            <a:r>
-              <a:rPr lang="zh-TW" altLang="en-US" sz="4800" b="1" dirty="0" smtClean="0">
-                <a:solidFill>
-                  <a:srgbClr val="000066"/>
-                </a:solidFill>
-                <a:latin typeface="Microsoft JhengHei" pitchFamily="34" charset="-120"/>
-                <a:ea typeface="Microsoft JhengHei" pitchFamily="34" charset="-120"/>
-              </a:rPr>
-              <a:t>名</a:t>
-            </a:r>
-            <a:r>
-              <a:rPr lang="zh-TW" altLang="en-US" sz="4800" b="1" dirty="0">
-                <a:solidFill>
-                  <a:srgbClr val="000066"/>
-                </a:solidFill>
-                <a:latin typeface="Microsoft JhengHei" pitchFamily="34" charset="-120"/>
-                <a:ea typeface="Microsoft JhengHei" pitchFamily="34" charset="-120"/>
-              </a:rPr>
-              <a:t>被尊崇為大</a:t>
+              <a:t>名被尊崇為大</a:t>
             </a:r>
             <a:endParaRPr lang="en-US" altLang="zh-TW" sz="4800" b="1" dirty="0">
               <a:solidFill>
@@ -3790,6 +3959,78 @@
               </a:solidFill>
               <a:latin typeface="Microsoft JhengHei" pitchFamily="34" charset="-120"/>
               <a:ea typeface="Microsoft JhengHei" pitchFamily="34" charset="-120"/>
+            </a:endParaRPr>
+          </a:p>
+        </p:txBody>
+      </p:sp>
+      <p:sp>
+        <p:nvSpPr>
+          <p:cNvPr id="2" name="TextBox 1">
+            <a:extLst>
+              <a:ext uri="{FF2B5EF4-FFF2-40B4-BE49-F238E27FC236}">
+                <a16:creationId xmlns:a16="http://schemas.microsoft.com/office/drawing/2014/main" id="{55899C84-037F-BECD-3A5D-BAC56EBFAD80}"/>
+              </a:ext>
+            </a:extLst>
+          </p:cNvPr>
+          <p:cNvSpPr txBox="1"/>
+          <p:nvPr/>
+        </p:nvSpPr>
+        <p:spPr>
+          <a:xfrm>
+            <a:off x="0" y="3845009"/>
+            <a:ext cx="9144000" cy="461665"/>
+          </a:xfrm>
+          <a:prstGeom prst="rect">
+            <a:avLst/>
+          </a:prstGeom>
+          <a:noFill/>
+        </p:spPr>
+        <p:txBody>
+          <a:bodyPr wrap="square" rtlCol="0">
+            <a:spAutoFit/>
+          </a:bodyPr>
+          <a:lstStyle/>
+          <a:p>
+            <a:pPr algn="ctr"/>
+            <a:r>
+              <a:rPr lang="en-US" sz="2400" b="1" dirty="0">
+                <a:solidFill>
+                  <a:srgbClr val="000066"/>
+                </a:solidFill>
+                <a:effectLst/>
+                <a:latin typeface="Microsoft JhengHei" panose="020B0604030504040204" pitchFamily="34" charset="-120"/>
+                <a:ea typeface="Microsoft JhengHei" panose="020B0604030504040204" pitchFamily="34" charset="-120"/>
+              </a:rPr>
+              <a:t>( </a:t>
+            </a:r>
+            <a:r>
+              <a:rPr lang="zh-CN" altLang="en-US" sz="2400" b="1" dirty="0">
+                <a:solidFill>
+                  <a:srgbClr val="000066"/>
+                </a:solidFill>
+                <a:effectLst/>
+                <a:latin typeface="Microsoft JhengHei" panose="020B0604030504040204" pitchFamily="34" charset="-120"/>
+                <a:ea typeface="Microsoft JhengHei" panose="020B0604030504040204" pitchFamily="34" charset="-120"/>
+              </a:rPr>
+              <a:t>橋</a:t>
+            </a:r>
+            <a:r>
+              <a:rPr lang="en-US" sz="2400" b="1" dirty="0">
+                <a:solidFill>
+                  <a:srgbClr val="000066"/>
+                </a:solidFill>
+                <a:effectLst/>
+                <a:latin typeface="Microsoft JhengHei" panose="020B0604030504040204" pitchFamily="34" charset="-120"/>
+                <a:ea typeface="Microsoft JhengHei" panose="020B0604030504040204" pitchFamily="34" charset="-120"/>
+              </a:rPr>
+              <a:t> )</a:t>
+            </a:r>
+            <a:endParaRPr lang="vi-VN" sz="2400" b="1" dirty="0">
+              <a:solidFill>
+                <a:srgbClr val="000066"/>
+              </a:solidFill>
+              <a:effectLst/>
+              <a:ea typeface="Microsoft JhengHei" panose="020B0604030504040204" pitchFamily="34" charset="-120"/>
             </a:endParaRPr>
           </a:p>
         </p:txBody>
@@ -3879,27 +4120,17 @@
                 <a:latin typeface="Microsoft JhengHei" pitchFamily="34" charset="-120"/>
                 <a:ea typeface="Microsoft JhengHei" pitchFamily="34" charset="-120"/>
               </a:rPr>
-              <a:t>凡有氣息都歸榮耀</a:t>
-            </a:r>
-            <a:r>
-              <a:rPr lang="zh-TW" altLang="en-US" sz="4800" b="1" dirty="0" smtClean="0">
+              <a:t>凡有氣息都歸榮耀給</a:t>
+            </a:r>
+            <a:r>
+              <a:rPr lang="zh-CN" altLang="en-US" sz="4800" b="1" dirty="0">
                 <a:solidFill>
                   <a:srgbClr val="000066"/>
                 </a:solidFill>
                 <a:latin typeface="Microsoft JhengHei" pitchFamily="34" charset="-120"/>
                 <a:ea typeface="Microsoft JhengHei" pitchFamily="34" charset="-120"/>
               </a:rPr>
-              <a:t>給</a:t>
-            </a:r>
-            <a:r>
-              <a:rPr lang="zh-CN" altLang="en-US" sz="4800" b="1" dirty="0">
-                <a:solidFill>
-                  <a:srgbClr val="000066"/>
-                </a:solidFill>
-                <a:latin typeface="Microsoft JhengHei" pitchFamily="34" charset="-120"/>
-                <a:ea typeface="Microsoft JhengHei" pitchFamily="34" charset="-120"/>
-              </a:rPr>
-              <a:t>袮</a:t>
+              <a:t>祢</a:t>
             </a:r>
             <a:endParaRPr lang="en-US" sz="4800" b="1" dirty="0">
               <a:solidFill>
@@ -3907,6 +4138,78 @@
               </a:solidFill>
               <a:latin typeface="Microsoft JhengHei" pitchFamily="34" charset="-120"/>
               <a:ea typeface="Microsoft JhengHei" pitchFamily="34" charset="-120"/>
+            </a:endParaRPr>
+          </a:p>
+        </p:txBody>
+      </p:sp>
+      <p:sp>
+        <p:nvSpPr>
+          <p:cNvPr id="2" name="TextBox 1">
+            <a:extLst>
+              <a:ext uri="{FF2B5EF4-FFF2-40B4-BE49-F238E27FC236}">
+                <a16:creationId xmlns:a16="http://schemas.microsoft.com/office/drawing/2014/main" id="{344BC8AE-E86C-B6D3-6679-5C391781ABCB}"/>
+              </a:ext>
+            </a:extLst>
+          </p:cNvPr>
+          <p:cNvSpPr txBox="1"/>
+          <p:nvPr/>
+        </p:nvSpPr>
+        <p:spPr>
+          <a:xfrm>
+            <a:off x="0" y="3845009"/>
+            <a:ext cx="9144000" cy="461665"/>
+          </a:xfrm>
+          <a:prstGeom prst="rect">
+            <a:avLst/>
+          </a:prstGeom>
+          <a:noFill/>
+        </p:spPr>
+        <p:txBody>
+          <a:bodyPr wrap="square" rtlCol="0">
+            <a:spAutoFit/>
+          </a:bodyPr>
+          <a:lstStyle/>
+          <a:p>
+            <a:pPr algn="ctr"/>
+            <a:r>
+              <a:rPr lang="en-US" sz="2400" b="1" dirty="0">
+                <a:solidFill>
+                  <a:srgbClr val="000066"/>
+                </a:solidFill>
+                <a:effectLst/>
+                <a:latin typeface="Microsoft JhengHei" panose="020B0604030504040204" pitchFamily="34" charset="-120"/>
+                <a:ea typeface="Microsoft JhengHei" panose="020B0604030504040204" pitchFamily="34" charset="-120"/>
+              </a:rPr>
+              <a:t>( </a:t>
+            </a:r>
+            <a:r>
+              <a:rPr lang="zh-CN" altLang="en-US" sz="2400" b="1" dirty="0">
+                <a:solidFill>
+                  <a:srgbClr val="000066"/>
+                </a:solidFill>
+                <a:effectLst/>
+                <a:latin typeface="Microsoft JhengHei" panose="020B0604030504040204" pitchFamily="34" charset="-120"/>
+                <a:ea typeface="Microsoft JhengHei" panose="020B0604030504040204" pitchFamily="34" charset="-120"/>
+              </a:rPr>
+              <a:t>橋</a:t>
+            </a:r>
+            <a:r>
+              <a:rPr lang="en-US" sz="2400" b="1" dirty="0">
+                <a:solidFill>
+                  <a:srgbClr val="000066"/>
+                </a:solidFill>
+                <a:effectLst/>
+                <a:latin typeface="Microsoft JhengHei" panose="020B0604030504040204" pitchFamily="34" charset="-120"/>
+                <a:ea typeface="Microsoft JhengHei" panose="020B0604030504040204" pitchFamily="34" charset="-120"/>
+              </a:rPr>
+              <a:t> )</a:t>
+            </a:r>
+            <a:endParaRPr lang="vi-VN" sz="2400" b="1" dirty="0">
+              <a:solidFill>
+                <a:srgbClr val="000066"/>
+              </a:solidFill>
+              <a:effectLst/>
+              <a:ea typeface="Microsoft JhengHei" panose="020B0604030504040204" pitchFamily="34" charset="-120"/>
             </a:endParaRPr>
           </a:p>
         </p:txBody>
